--- a/system-design-101/vi/lessons/sd-09-002/slides/sd-09-002.pptx
+++ b/system-design-101/vi/lessons/sd-09-002/slides/sd-09-002.pptx
@@ -4574,6 +4574,28 @@
               <a:buNone/>
             </a:pPr>
             <a:r>
+              <a:rPr lang="en-US" sz="2250" b="1" dirty="0" spc="-31" kern="0">
+                <a:solidFill>
+                  <a:srgbClr val="14161C"/>
+                </a:solidFill>
+                <a:latin typeface="Be Vietnam Pro" pitchFamily="34" charset="0"/>
+                <a:ea typeface="Be Vietnam Pro" pitchFamily="34" charset="-122"/>
+                <a:cs typeface="Be Vietnam Pro" pitchFamily="34" charset="-120"/>
+              </a:rPr>
+              <a:t>Xem</a:t>
+            </a:r>
+            <a:r>
+              <a:rPr lang="en-US" sz="2250" b="1" dirty="0" spc="-23" kern="0">
+                <a:solidFill>
+                  <a:srgbClr val="14161C"/>
+                </a:solidFill>
+                <a:latin typeface="Be Vietnam Pro" pitchFamily="34" charset="0"/>
+                <a:ea typeface="Be Vietnam Pro" pitchFamily="34" charset="-122"/>
+                <a:cs typeface="Be Vietnam Pro" pitchFamily="34" charset="-120"/>
+              </a:rPr>
+              <a:t> xét</a:t>
+            </a:r>
+            <a:r>
               <a:rPr lang="en-US" sz="2250" b="1" dirty="0" spc="-4" kern="0">
                 <a:solidFill>
                   <a:srgbClr val="14161C"/>
@@ -4582,7 +4604,7 @@
                 <a:ea typeface="Be Vietnam Pro" pitchFamily="34" charset="-122"/>
                 <a:cs typeface="Be Vietnam Pro" pitchFamily="34" charset="-120"/>
               </a:rPr>
-              <a:t>Thay</a:t>
+              <a:t> thay</a:t>
             </a:r>
             <a:r>
               <a:rPr lang="en-US" sz="2250" b="1" dirty="0" spc="8" kern="0">
@@ -4596,7 +4618,7 @@
               <a:t> đổi</a:t>
             </a:r>
             <a:r>
-              <a:rPr lang="en-US" sz="2250" b="1" dirty="0" spc="11" kern="0">
+              <a:rPr lang="en-US" sz="2250" b="1" dirty="0" spc="10" kern="0">
                 <a:solidFill>
                   <a:srgbClr val="14161C"/>
                 </a:solidFill>
@@ -4604,43 +4626,10 @@
                 <a:ea typeface="Be Vietnam Pro" pitchFamily="34" charset="-122"/>
                 <a:cs typeface="Be Vietnam Pro" pitchFamily="34" charset="-120"/>
               </a:rPr>
-              <a:t> được</a:t>
-            </a:r>
-            <a:r>
-              <a:rPr lang="en-US" sz="2250" b="1" dirty="0" spc="-19" kern="0">
-                <a:solidFill>
-                  <a:srgbClr val="14161C"/>
-                </a:solidFill>
-                <a:latin typeface="Be Vietnam Pro" pitchFamily="34" charset="0"/>
-                <a:ea typeface="Be Vietnam Pro" pitchFamily="34" charset="-122"/>
-                <a:cs typeface="Be Vietnam Pro" pitchFamily="34" charset="-120"/>
-              </a:rPr>
-              <a:t> xem</a:t>
-            </a:r>
-            <a:r>
-              <a:rPr lang="en-US" sz="2250" b="1" dirty="0" spc="-23" kern="0">
-                <a:solidFill>
-                  <a:srgbClr val="14161C"/>
-                </a:solidFill>
-                <a:latin typeface="Be Vietnam Pro" pitchFamily="34" charset="0"/>
-                <a:ea typeface="Be Vietnam Pro" pitchFamily="34" charset="-122"/>
-                <a:cs typeface="Be Vietnam Pro" pitchFamily="34" charset="-120"/>
-              </a:rPr>
-              <a:t> xét</a:t>
-            </a:r>
-            <a:r>
-              <a:rPr lang="en-US" sz="2250" b="1" dirty="0" spc="9" kern="0">
-                <a:solidFill>
-                  <a:srgbClr val="14161C"/>
-                </a:solidFill>
-                <a:latin typeface="Be Vietnam Pro" pitchFamily="34" charset="0"/>
-                <a:ea typeface="Be Vietnam Pro" pitchFamily="34" charset="-122"/>
-                <a:cs typeface="Be Vietnam Pro" pitchFamily="34" charset="-120"/>
-              </a:rPr>
               <a:t> trước</a:t>
             </a:r>
             <a:r>
-              <a:rPr lang="en-US" sz="2250" b="1" dirty="0" spc="3" kern="0">
+              <a:rPr lang="en-US" sz="2250" b="1" dirty="0" spc="2" kern="0">
                 <a:solidFill>
                   <a:srgbClr val="14161C"/>
                 </a:solidFill>
@@ -9754,7 +9743,7 @@
               <a:t>Pull</a:t>
             </a:r>
             <a:r>
-              <a:rPr lang="en-US" sz="2100" dirty="0" spc="-17" kern="0">
+              <a:rPr lang="en-US" sz="2100" dirty="0" spc="-15" kern="0">
                 <a:solidFill>
                   <a:srgbClr val="6B6A66"/>
                 </a:solidFill>
@@ -9762,7 +9751,73 @@
                 <a:ea typeface="Be Vietnam Pro" pitchFamily="34" charset="-122"/>
                 <a:cs typeface="Be Vietnam Pro" pitchFamily="34" charset="-120"/>
               </a:rPr>
-              <a:t> request</a:t>
+              <a:t> request:</a:t>
+            </a:r>
+            <a:r>
+              <a:rPr lang="en-US" sz="2100" dirty="0" spc="1" kern="0">
+                <a:solidFill>
+                  <a:srgbClr val="6B6A66"/>
+                </a:solidFill>
+                <a:latin typeface="Be Vietnam Pro" pitchFamily="34" charset="0"/>
+                <a:ea typeface="Be Vietnam Pro" pitchFamily="34" charset="-122"/>
+                <a:cs typeface="Be Vietnam Pro" pitchFamily="34" charset="-120"/>
+              </a:rPr>
+              <a:t> tính</a:t>
+            </a:r>
+            <a:r>
+              <a:rPr lang="en-US" sz="2100" dirty="0" spc="0" kern="0">
+                <a:solidFill>
+                  <a:srgbClr val="6B6A66"/>
+                </a:solidFill>
+                <a:latin typeface="Be Vietnam Pro" pitchFamily="34" charset="0"/>
+                <a:ea typeface="Be Vietnam Pro" pitchFamily="34" charset="-122"/>
+                <a:cs typeface="Be Vietnam Pro" pitchFamily="34" charset="-120"/>
+              </a:rPr>
+              <a:t> năng</a:t>
+            </a:r>
+            <a:r>
+              <a:rPr lang="en-US" sz="2100" dirty="0" spc="-1" kern="0">
+                <a:solidFill>
+                  <a:srgbClr val="6B6A66"/>
+                </a:solidFill>
+                <a:latin typeface="Be Vietnam Pro" pitchFamily="34" charset="0"/>
+                <a:ea typeface="Be Vietnam Pro" pitchFamily="34" charset="-122"/>
+                <a:cs typeface="Be Vietnam Pro" pitchFamily="34" charset="-120"/>
+              </a:rPr>
+              <a:t> của</a:t>
+            </a:r>
+            <a:r>
+              <a:rPr lang="en-US" sz="2100" dirty="0" spc="1" kern="0">
+                <a:solidFill>
+                  <a:srgbClr val="6B6A66"/>
+                </a:solidFill>
+                <a:latin typeface="Be Vietnam Pro" pitchFamily="34" charset="0"/>
+                <a:ea typeface="Be Vietnam Pro" pitchFamily="34" charset="-122"/>
+                <a:cs typeface="Be Vietnam Pro" pitchFamily="34" charset="-120"/>
+              </a:rPr>
+              <a:t> nền</a:t>
+            </a:r>
+            <a:r>
+              <a:rPr lang="en-US" sz="2100" dirty="0" spc="-8" kern="0">
+                <a:solidFill>
+                  <a:srgbClr val="6B6A66"/>
+                </a:solidFill>
+                <a:latin typeface="Be Vietnam Pro" pitchFamily="34" charset="0"/>
+                <a:ea typeface="Be Vietnam Pro" pitchFamily="34" charset="-122"/>
+                <a:cs typeface="Be Vietnam Pro" pitchFamily="34" charset="-120"/>
+              </a:rPr>
+              <a:t> tảng,</a:t>
+            </a:r>
+            <a:r>
+              <a:rPr lang="en-US" sz="2100" dirty="0" spc="-1" kern="0">
+                <a:solidFill>
+                  <a:srgbClr val="6B6A66"/>
+                </a:solidFill>
+                <a:latin typeface="Be Vietnam Pro" pitchFamily="34" charset="0"/>
+                <a:ea typeface="Be Vietnam Pro" pitchFamily="34" charset="-122"/>
+                <a:cs typeface="Be Vietnam Pro" pitchFamily="34" charset="-120"/>
+              </a:rPr>
+              <a:t> không</a:t>
             </a:r>
             <a:r>
               <a:rPr lang="en-US" sz="2100" dirty="0" spc="-2" kern="0">
@@ -9773,106 +9828,7 @@
                 <a:ea typeface="Be Vietnam Pro" pitchFamily="34" charset="-122"/>
                 <a:cs typeface="Be Vietnam Pro" pitchFamily="34" charset="-120"/>
               </a:rPr>
-              <a:t> là</a:t>
-            </a:r>
-            <a:r>
-              <a:rPr lang="en-US" sz="2100" dirty="0" spc="0" kern="0">
-                <a:solidFill>
-                  <a:srgbClr val="6B6A66"/>
-                </a:solidFill>
-                <a:latin typeface="Be Vietnam Pro" pitchFamily="34" charset="0"/>
-                <a:ea typeface="Be Vietnam Pro" pitchFamily="34" charset="-122"/>
-                <a:cs typeface="Be Vietnam Pro" pitchFamily="34" charset="-120"/>
-              </a:rPr>
-              <a:t> tính năng</a:t>
-            </a:r>
-            <a:r>
-              <a:rPr lang="en-US" sz="2100" dirty="0" spc="-1" kern="0">
-                <a:solidFill>
-                  <a:srgbClr val="6B6A66"/>
-                </a:solidFill>
-                <a:latin typeface="Be Vietnam Pro" pitchFamily="34" charset="0"/>
-                <a:ea typeface="Be Vietnam Pro" pitchFamily="34" charset="-122"/>
-                <a:cs typeface="Be Vietnam Pro" pitchFamily="34" charset="-120"/>
-              </a:rPr>
-              <a:t> của</a:t>
-            </a:r>
-            <a:r>
-              <a:rPr lang="en-US" sz="2100" dirty="0" spc="2" kern="0">
-                <a:solidFill>
-                  <a:srgbClr val="6B6A66"/>
-                </a:solidFill>
-                <a:latin typeface="Be Vietnam Pro" pitchFamily="34" charset="0"/>
-                <a:ea typeface="Be Vietnam Pro" pitchFamily="34" charset="-122"/>
-                <a:cs typeface="Be Vietnam Pro" pitchFamily="34" charset="-120"/>
-              </a:rPr>
-              <a:t> nền</a:t>
-            </a:r>
-            <a:r>
-              <a:rPr lang="en-US" sz="2100" dirty="0" spc="-10" kern="0">
-                <a:solidFill>
-                  <a:srgbClr val="6B6A66"/>
-                </a:solidFill>
-                <a:latin typeface="Be Vietnam Pro" pitchFamily="34" charset="0"/>
-                <a:ea typeface="Be Vietnam Pro" pitchFamily="34" charset="-122"/>
-                <a:cs typeface="Be Vietnam Pro" pitchFamily="34" charset="-120"/>
-              </a:rPr>
-              <a:t> tảng</a:t>
-            </a:r>
-            <a:r>
-              <a:rPr lang="en-US" sz="2100" dirty="0" spc="-1" kern="0">
-                <a:solidFill>
-                  <a:srgbClr val="6B6A66"/>
-                </a:solidFill>
-                <a:latin typeface="Be Vietnam Pro" pitchFamily="34" charset="0"/>
-                <a:ea typeface="Be Vietnam Pro" pitchFamily="34" charset="-122"/>
-                <a:cs typeface="Be Vietnam Pro" pitchFamily="34" charset="-120"/>
-              </a:rPr>
-              <a:t> cộng</a:t>
-            </a:r>
-            <a:r>
-              <a:rPr lang="en-US" sz="2100" dirty="0" spc="-11" kern="0">
-                <a:solidFill>
-                  <a:srgbClr val="6B6A66"/>
-                </a:solidFill>
-                <a:latin typeface="Be Vietnam Pro" pitchFamily="34" charset="0"/>
-                <a:ea typeface="Be Vietnam Pro" pitchFamily="34" charset="-122"/>
-                <a:cs typeface="Be Vietnam Pro" pitchFamily="34" charset="-120"/>
-              </a:rPr>
-              <a:t> tác,</a:t>
-            </a:r>
-            <a:r>
-              <a:rPr lang="en-US" sz="2100" dirty="0" spc="-1" kern="0">
-                <a:solidFill>
-                  <a:srgbClr val="6B6A66"/>
-                </a:solidFill>
-                <a:latin typeface="Be Vietnam Pro" pitchFamily="34" charset="0"/>
-                <a:ea typeface="Be Vietnam Pro" pitchFamily="34" charset="-122"/>
-                <a:cs typeface="Be Vietnam Pro" pitchFamily="34" charset="-120"/>
-              </a:rPr>
-              <a:t> không</a:t>
-            </a:r>
-            <a:r>
-              <a:rPr lang="en-US" sz="2100" dirty="0" spc="-2" kern="0">
-                <a:solidFill>
-                  <a:srgbClr val="6B6A66"/>
-                </a:solidFill>
-                <a:latin typeface="Be Vietnam Pro" pitchFamily="34" charset="0"/>
-                <a:ea typeface="Be Vietnam Pro" pitchFamily="34" charset="-122"/>
-                <a:cs typeface="Be Vietnam Pro" pitchFamily="34" charset="-120"/>
-              </a:rPr>
               <a:t> phải</a:t>
-            </a:r>
-            <a:r>
-              <a:rPr lang="en-US" sz="2100" dirty="0" spc="0" kern="0">
-                <a:solidFill>
-                  <a:srgbClr val="6B6A66"/>
-                </a:solidFill>
-                <a:latin typeface="Be Vietnam Pro" pitchFamily="34" charset="0"/>
-                <a:ea typeface="Be Vietnam Pro" pitchFamily="34" charset="-122"/>
-                <a:cs typeface="Be Vietnam Pro" pitchFamily="34" charset="-120"/>
-              </a:rPr>
-              <a:t> của</a:t>
             </a:r>
             <a:r>
               <a:rPr lang="en-US" sz="2100" dirty="0" spc="-1" kern="0">
@@ -13176,7 +13132,7 @@
               <a:t> nội dung</a:t>
             </a:r>
             <a:r>
-              <a:rPr lang="en-US" sz="2700" dirty="0" spc="1" kern="0">
+              <a:rPr lang="en-US" sz="2700" dirty="0" spc="2" kern="0">
                 <a:solidFill>
                   <a:srgbClr val="14161C"/>
                 </a:solidFill>
@@ -13184,7 +13140,18 @@
                 <a:ea typeface="Be Vietnam Pro" pitchFamily="34" charset="-122"/>
                 <a:cs typeface="Be Vietnam Pro" pitchFamily="34" charset="-120"/>
               </a:rPr>
-              <a:t> cuối</a:t>
+              <a:t> cuối,</a:t>
+            </a:r>
+            <a:r>
+              <a:rPr lang="en-US" sz="2700" dirty="0" spc="-3" kern="0">
+                <a:solidFill>
+                  <a:srgbClr val="14161C"/>
+                </a:solidFill>
+                <a:latin typeface="Be Vietnam Pro" pitchFamily="34" charset="0"/>
+                <a:ea typeface="Be Vietnam Pro" pitchFamily="34" charset="-122"/>
+                <a:cs typeface="Be Vietnam Pro" pitchFamily="34" charset="-120"/>
+              </a:rPr>
+              <a:t> không</a:t>
             </a:r>
             <a:r>
               <a:rPr lang="en-US" sz="2700" dirty="0" spc="-1" kern="0">
@@ -13195,10 +13162,10 @@
                 <a:ea typeface="Be Vietnam Pro" pitchFamily="34" charset="-122"/>
                 <a:cs typeface="Be Vietnam Pro" pitchFamily="34" charset="-120"/>
               </a:rPr>
-              <a:t> cùng,</a:t>
-            </a:r>
-            <a:r>
-              <a:rPr lang="en-US" sz="2700" dirty="0" spc="-2" kern="0">
+              <a:t> chỉ</a:t>
+            </a:r>
+            <a:r>
+              <a:rPr lang="en-US" sz="2700" dirty="0" spc="-26" kern="0">
                 <a:solidFill>
                   <a:srgbClr val="14161C"/>
                 </a:solidFill>
@@ -13206,32 +13173,10 @@
                 <a:ea typeface="Be Vietnam Pro" pitchFamily="34" charset="-122"/>
                 <a:cs typeface="Be Vietnam Pro" pitchFamily="34" charset="-120"/>
               </a:rPr>
-              <a:t> không</a:t>
+              <a:t> xóa</a:t>
             </a:r>
             <a:r>
               <a:rPr lang="en-US" sz="2700" dirty="0" spc="-1" kern="0">
-                <a:solidFill>
-                  <a:srgbClr val="14161C"/>
-                </a:solidFill>
-                <a:latin typeface="Be Vietnam Pro" pitchFamily="34" charset="0"/>
-                <a:ea typeface="Be Vietnam Pro" pitchFamily="34" charset="-122"/>
-                <a:cs typeface="Be Vietnam Pro" pitchFamily="34" charset="-120"/>
-              </a:rPr>
-              <a:t> chỉ</a:t>
-            </a:r>
-            <a:r>
-              <a:rPr lang="en-US" sz="2700" dirty="0" spc="-27" kern="0">
-                <a:solidFill>
-                  <a:srgbClr val="14161C"/>
-                </a:solidFill>
-                <a:latin typeface="Be Vietnam Pro" pitchFamily="34" charset="0"/>
-                <a:ea typeface="Be Vietnam Pro" pitchFamily="34" charset="-122"/>
-                <a:cs typeface="Be Vietnam Pro" pitchFamily="34" charset="-120"/>
-              </a:rPr>
-              <a:t> xóa</a:t>
-            </a:r>
-            <a:r>
-              <a:rPr lang="en-US" sz="2700" dirty="0" spc="0" kern="0">
                 <a:solidFill>
                   <a:srgbClr val="14161C"/>
                 </a:solidFill>
@@ -13605,28 +13550,6 @@
                 <a:cs typeface="Be Vietnam Pro" pitchFamily="34" charset="-120"/>
               </a:rPr>
               <a:t> đổi</a:t>
-            </a:r>
-            <a:r>
-              <a:rPr lang="en-US" sz="2700" dirty="0" spc="6" kern="0">
-                <a:solidFill>
-                  <a:srgbClr val="F3EEE3"/>
-                </a:solidFill>
-                <a:latin typeface="Be Vietnam Pro" pitchFamily="34" charset="0"/>
-                <a:ea typeface="Be Vietnam Pro" pitchFamily="34" charset="-122"/>
-                <a:cs typeface="Be Vietnam Pro" pitchFamily="34" charset="-120"/>
-              </a:rPr>
-              <a:t> riêng</a:t>
-            </a:r>
-            <a:r>
-              <a:rPr lang="en-US" sz="2700" dirty="0" spc="12" kern="0">
-                <a:solidFill>
-                  <a:srgbClr val="F3EEE3"/>
-                </a:solidFill>
-                <a:latin typeface="Be Vietnam Pro" pitchFamily="34" charset="0"/>
-                <a:ea typeface="Be Vietnam Pro" pitchFamily="34" charset="-122"/>
-                <a:cs typeface="Be Vietnam Pro" pitchFamily="34" charset="-120"/>
-              </a:rPr>
-              <a:t> đều</a:t>
             </a:r>
             <a:r>
               <a:rPr lang="en-US" sz="2700" dirty="0" spc="-2" kern="0">
